--- a/docs/02-visual-studio-agent/slides.pptx
+++ b/docs/02-visual-studio-agent/slides.pptx
@@ -3129,7 +3129,7 @@
           <a:lstStyle/>
           <a:p>
             <a:pPr>
-              <a:defRPr sz="4000" b="1">
+              <a:defRPr sz="4400" b="1">
                 <a:solidFill>
                   <a:srgbClr val="FFFFFF"/>
                 </a:solidFill>
@@ -3164,7 +3164,7 @@
           <a:lstStyle/>
           <a:p>
             <a:pPr>
-              <a:defRPr sz="2200">
+              <a:defRPr sz="2400">
                 <a:solidFill>
                   <a:srgbClr val="4F8CFF"/>
                 </a:solidFill>
@@ -3199,7 +3199,7 @@
           <a:lstStyle/>
           <a:p>
             <a:pPr>
-              <a:defRPr sz="1600">
+              <a:defRPr sz="1800">
                 <a:solidFill>
                   <a:srgbClr val="CCD6F6"/>
                 </a:solidFill>
@@ -3346,7 +3346,7 @@
           <a:lstStyle/>
           <a:p>
             <a:pPr>
-              <a:defRPr sz="3000" b="1">
+              <a:defRPr sz="3200" b="1">
                 <a:solidFill>
                   <a:srgbClr val="111C3B"/>
                 </a:solidFill>
@@ -3376,7 +3376,7 @@
         </p:spPr>
         <p:txBody>
           <a:bodyPr wrap="square">
-            <a:spAutoFit/>
+            <a:normAutofit/>
           </a:bodyPr>
           <a:lstStyle/>
           <a:p>
@@ -3384,7 +3384,7 @@
               <a:spcAft>
                 <a:spcPts val="1200"/>
               </a:spcAft>
-              <a:defRPr sz="1700">
+              <a:defRPr sz="1900">
                 <a:solidFill>
                   <a:srgbClr val="333A4D"/>
                 </a:solidFill>
@@ -3399,7 +3399,7 @@
               <a:spcAft>
                 <a:spcPts val="1200"/>
               </a:spcAft>
-              <a:defRPr sz="1700">
+              <a:defRPr sz="1900">
                 <a:solidFill>
                   <a:srgbClr val="333A4D"/>
                 </a:solidFill>
@@ -3414,7 +3414,7 @@
               <a:spcAft>
                 <a:spcPts val="1200"/>
               </a:spcAft>
-              <a:defRPr sz="1700">
+              <a:defRPr sz="1900">
                 <a:solidFill>
                   <a:srgbClr val="333A4D"/>
                 </a:solidFill>
@@ -3429,7 +3429,7 @@
               <a:spcAft>
                 <a:spcPts val="1200"/>
               </a:spcAft>
-              <a:defRPr sz="1700">
+              <a:defRPr sz="1900">
                 <a:solidFill>
                   <a:srgbClr val="333A4D"/>
                 </a:solidFill>
@@ -3444,7 +3444,7 @@
               <a:spcAft>
                 <a:spcPts val="1200"/>
               </a:spcAft>
-              <a:defRPr sz="1700">
+              <a:defRPr sz="1900">
                 <a:solidFill>
                   <a:srgbClr val="333A4D"/>
                 </a:solidFill>
@@ -3459,7 +3459,7 @@
               <a:spcAft>
                 <a:spcPts val="1200"/>
               </a:spcAft>
-              <a:defRPr sz="1700">
+              <a:defRPr sz="1900">
                 <a:solidFill>
                   <a:srgbClr val="333A4D"/>
                 </a:solidFill>
@@ -3537,7 +3537,7 @@
           <a:lstStyle/>
           <a:p>
             <a:r>
-              <a:rPr sz="1100" b="1">
+              <a:rPr sz="1200" b="1">
                 <a:solidFill>
                   <a:srgbClr val="4F8CFF"/>
                 </a:solidFill>
@@ -3545,7 +3545,7 @@
               <a:t>용어 설명   </a:t>
             </a:r>
             <a:r>
-              <a:rPr sz="1100">
+              <a:rPr sz="1200">
                 <a:solidFill>
                   <a:srgbClr val="333A4D"/>
                 </a:solidFill>
@@ -3553,7 +3553,7 @@
               <a:t/>
             </a:r>
             <a:r>
-              <a:rPr sz="1100" b="1">
+              <a:rPr sz="1200" b="1">
                 <a:solidFill>
                   <a:srgbClr val="111C3B"/>
                 </a:solidFill>
@@ -3561,7 +3561,7 @@
               <a:t>GitHub </a:t>
             </a:r>
             <a:r>
-              <a:rPr sz="1100">
+              <a:rPr sz="1200">
                 <a:solidFill>
                   <a:srgbClr val="333A4D"/>
                 </a:solidFill>
@@ -3569,7 +3569,7 @@
               <a:t>코드와 파일을 인터넷에 저장하고 다른 사람과 함께 관리할 수 있는 사이트</a:t>
             </a:r>
             <a:r>
-              <a:rPr sz="1100">
+              <a:rPr sz="1200">
                 <a:solidFill>
                   <a:srgbClr val="333A4D"/>
                 </a:solidFill>
@@ -3577,7 +3577,7 @@
               <a:t>     ·     </a:t>
             </a:r>
             <a:r>
-              <a:rPr sz="1100" b="1">
+              <a:rPr sz="1200" b="1">
                 <a:solidFill>
                   <a:srgbClr val="111C3B"/>
                 </a:solidFill>
@@ -3585,7 +3585,7 @@
               <a:t>GitHub Pages </a:t>
             </a:r>
             <a:r>
-              <a:rPr sz="1100">
+              <a:rPr sz="1200">
                 <a:solidFill>
                   <a:srgbClr val="333A4D"/>
                 </a:solidFill>
@@ -3593,7 +3593,7 @@
               <a:t>GitHub에 저장된 파일을 무료로 웹페이지처럼 볼 수 있게 해주는 기능</a:t>
             </a:r>
             <a:r>
-              <a:rPr sz="1100">
+              <a:rPr sz="1200">
                 <a:solidFill>
                   <a:srgbClr val="333A4D"/>
                 </a:solidFill>
@@ -3601,7 +3601,7 @@
               <a:t>     ·     </a:t>
             </a:r>
             <a:r>
-              <a:rPr sz="1100" b="1">
+              <a:rPr sz="1200" b="1">
                 <a:solidFill>
                   <a:srgbClr val="111C3B"/>
                 </a:solidFill>
@@ -3609,7 +3609,7 @@
               <a:t>저장소(Repository) </a:t>
             </a:r>
             <a:r>
-              <a:rPr sz="1100">
+              <a:rPr sz="1200">
                 <a:solidFill>
                   <a:srgbClr val="333A4D"/>
                 </a:solidFill>
@@ -3746,7 +3746,7 @@
           <a:lstStyle/>
           <a:p>
             <a:pPr>
-              <a:defRPr sz="3000" b="1">
+              <a:defRPr sz="3200" b="1">
                 <a:solidFill>
                   <a:srgbClr val="111C3B"/>
                 </a:solidFill>
@@ -3776,7 +3776,7 @@
         </p:spPr>
         <p:txBody>
           <a:bodyPr wrap="square">
-            <a:spAutoFit/>
+            <a:normAutofit/>
           </a:bodyPr>
           <a:lstStyle/>
           <a:p>
@@ -3784,7 +3784,7 @@
               <a:spcAft>
                 <a:spcPts val="1200"/>
               </a:spcAft>
-              <a:defRPr sz="1700">
+              <a:defRPr sz="1900">
                 <a:solidFill>
                   <a:srgbClr val="333A4D"/>
                 </a:solidFill>
@@ -3799,7 +3799,7 @@
               <a:spcAft>
                 <a:spcPts val="1200"/>
               </a:spcAft>
-              <a:defRPr sz="1700">
+              <a:defRPr sz="1900">
                 <a:solidFill>
                   <a:srgbClr val="333A4D"/>
                 </a:solidFill>
@@ -3814,7 +3814,7 @@
               <a:spcAft>
                 <a:spcPts val="1200"/>
               </a:spcAft>
-              <a:defRPr sz="1700">
+              <a:defRPr sz="1900">
                 <a:solidFill>
                   <a:srgbClr val="333A4D"/>
                 </a:solidFill>
@@ -3829,7 +3829,7 @@
               <a:spcAft>
                 <a:spcPts val="1200"/>
               </a:spcAft>
-              <a:defRPr sz="1700">
+              <a:defRPr sz="1900">
                 <a:solidFill>
                   <a:srgbClr val="333A4D"/>
                 </a:solidFill>
@@ -3968,7 +3968,7 @@
           <a:lstStyle/>
           <a:p>
             <a:pPr>
-              <a:defRPr sz="3000" b="1">
+              <a:defRPr sz="3200" b="1">
                 <a:solidFill>
                   <a:srgbClr val="111C3B"/>
                 </a:solidFill>
@@ -3998,7 +3998,7 @@
         </p:spPr>
         <p:txBody>
           <a:bodyPr wrap="square">
-            <a:spAutoFit/>
+            <a:normAutofit/>
           </a:bodyPr>
           <a:lstStyle/>
           <a:p>
@@ -4006,7 +4006,7 @@
               <a:spcAft>
                 <a:spcPts val="1200"/>
               </a:spcAft>
-              <a:defRPr sz="1700">
+              <a:defRPr sz="1900">
                 <a:solidFill>
                   <a:srgbClr val="333A4D"/>
                 </a:solidFill>
@@ -4021,7 +4021,7 @@
               <a:spcAft>
                 <a:spcPts val="1200"/>
               </a:spcAft>
-              <a:defRPr sz="1700">
+              <a:defRPr sz="1900">
                 <a:solidFill>
                   <a:srgbClr val="333A4D"/>
                 </a:solidFill>
@@ -4036,7 +4036,7 @@
               <a:spcAft>
                 <a:spcPts val="1200"/>
               </a:spcAft>
-              <a:defRPr sz="1700">
+              <a:defRPr sz="1900">
                 <a:solidFill>
                   <a:srgbClr val="333A4D"/>
                 </a:solidFill>
@@ -4051,7 +4051,7 @@
               <a:spcAft>
                 <a:spcPts val="1200"/>
               </a:spcAft>
-              <a:defRPr sz="1700">
+              <a:defRPr sz="1900">
                 <a:solidFill>
                   <a:srgbClr val="333A4D"/>
                 </a:solidFill>
@@ -4066,7 +4066,7 @@
               <a:spcAft>
                 <a:spcPts val="1200"/>
               </a:spcAft>
-              <a:defRPr sz="1700">
+              <a:defRPr sz="1900">
                 <a:solidFill>
                   <a:srgbClr val="333A4D"/>
                 </a:solidFill>
@@ -4144,7 +4144,7 @@
           <a:lstStyle/>
           <a:p>
             <a:r>
-              <a:rPr sz="1100" b="1">
+              <a:rPr sz="1200" b="1">
                 <a:solidFill>
                   <a:srgbClr val="4F8CFF"/>
                 </a:solidFill>
@@ -4152,7 +4152,7 @@
               <a:t>용어 설명   </a:t>
             </a:r>
             <a:r>
-              <a:rPr sz="1100">
+              <a:rPr sz="1200">
                 <a:solidFill>
                   <a:srgbClr val="333A4D"/>
                 </a:solidFill>
@@ -4160,7 +4160,7 @@
               <a:t/>
             </a:r>
             <a:r>
-              <a:rPr sz="1100" b="1">
+              <a:rPr sz="1200" b="1">
                 <a:solidFill>
                   <a:srgbClr val="111C3B"/>
                 </a:solidFill>
@@ -4168,7 +4168,7 @@
               <a:t>자동화 </a:t>
             </a:r>
             <a:r>
-              <a:rPr sz="1100">
+              <a:rPr sz="1200">
                 <a:solidFill>
                   <a:srgbClr val="333A4D"/>
                 </a:solidFill>
@@ -4305,7 +4305,7 @@
           <a:lstStyle/>
           <a:p>
             <a:pPr>
-              <a:defRPr sz="3000" b="1">
+              <a:defRPr sz="3200" b="1">
                 <a:solidFill>
                   <a:srgbClr val="111C3B"/>
                 </a:solidFill>
@@ -4335,7 +4335,7 @@
         </p:spPr>
         <p:txBody>
           <a:bodyPr wrap="square">
-            <a:spAutoFit/>
+            <a:normAutofit/>
           </a:bodyPr>
           <a:lstStyle/>
           <a:p>
@@ -4343,7 +4343,7 @@
               <a:spcAft>
                 <a:spcPts val="1200"/>
               </a:spcAft>
-              <a:defRPr sz="1700">
+              <a:defRPr sz="1900">
                 <a:solidFill>
                   <a:srgbClr val="333A4D"/>
                 </a:solidFill>
@@ -4358,7 +4358,7 @@
               <a:spcAft>
                 <a:spcPts val="1200"/>
               </a:spcAft>
-              <a:defRPr sz="1700">
+              <a:defRPr sz="1900">
                 <a:solidFill>
                   <a:srgbClr val="333A4D"/>
                 </a:solidFill>
@@ -4373,7 +4373,7 @@
               <a:spcAft>
                 <a:spcPts val="1200"/>
               </a:spcAft>
-              <a:defRPr sz="1700">
+              <a:defRPr sz="1900">
                 <a:solidFill>
                   <a:srgbClr val="333A4D"/>
                 </a:solidFill>
@@ -4388,7 +4388,7 @@
               <a:spcAft>
                 <a:spcPts val="1200"/>
               </a:spcAft>
-              <a:defRPr sz="1700">
+              <a:defRPr sz="1900">
                 <a:solidFill>
                   <a:srgbClr val="333A4D"/>
                 </a:solidFill>
@@ -4403,7 +4403,7 @@
               <a:spcAft>
                 <a:spcPts val="1200"/>
               </a:spcAft>
-              <a:defRPr sz="1700">
+              <a:defRPr sz="1900">
                 <a:solidFill>
                   <a:srgbClr val="333A4D"/>
                 </a:solidFill>
@@ -4418,7 +4418,7 @@
               <a:spcAft>
                 <a:spcPts val="1200"/>
               </a:spcAft>
-              <a:defRPr sz="1700">
+              <a:defRPr sz="1900">
                 <a:solidFill>
                   <a:srgbClr val="333A4D"/>
                 </a:solidFill>
@@ -4496,7 +4496,7 @@
           <a:lstStyle/>
           <a:p>
             <a:r>
-              <a:rPr sz="1100" b="1">
+              <a:rPr sz="1200" b="1">
                 <a:solidFill>
                   <a:srgbClr val="4F8CFF"/>
                 </a:solidFill>
@@ -4504,7 +4504,7 @@
               <a:t>용어 설명   </a:t>
             </a:r>
             <a:r>
-              <a:rPr sz="1100">
+              <a:rPr sz="1200">
                 <a:solidFill>
                   <a:srgbClr val="333A4D"/>
                 </a:solidFill>
@@ -4512,7 +4512,7 @@
               <a:t/>
             </a:r>
             <a:r>
-              <a:rPr sz="1100" b="1">
+              <a:rPr sz="1200" b="1">
                 <a:solidFill>
                   <a:srgbClr val="111C3B"/>
                 </a:solidFill>
@@ -4520,7 +4520,7 @@
               <a:t>홈택스 </a:t>
             </a:r>
             <a:r>
-              <a:rPr sz="1100">
+              <a:rPr sz="1200">
                 <a:solidFill>
                   <a:srgbClr val="333A4D"/>
                 </a:solidFill>
@@ -4657,7 +4657,7 @@
           <a:lstStyle/>
           <a:p>
             <a:pPr>
-              <a:defRPr sz="3000" b="1">
+              <a:defRPr sz="3200" b="1">
                 <a:solidFill>
                   <a:srgbClr val="111C3B"/>
                 </a:solidFill>
@@ -4687,7 +4687,7 @@
         </p:spPr>
         <p:txBody>
           <a:bodyPr wrap="square">
-            <a:spAutoFit/>
+            <a:normAutofit/>
           </a:bodyPr>
           <a:lstStyle/>
           <a:p>
@@ -4695,7 +4695,7 @@
               <a:spcAft>
                 <a:spcPts val="1200"/>
               </a:spcAft>
-              <a:defRPr sz="1700">
+              <a:defRPr sz="1900">
                 <a:solidFill>
                   <a:srgbClr val="333A4D"/>
                 </a:solidFill>
@@ -4710,7 +4710,7 @@
               <a:spcAft>
                 <a:spcPts val="1200"/>
               </a:spcAft>
-              <a:defRPr sz="1700">
+              <a:defRPr sz="1900">
                 <a:solidFill>
                   <a:srgbClr val="333A4D"/>
                 </a:solidFill>
@@ -4725,7 +4725,7 @@
               <a:spcAft>
                 <a:spcPts val="1200"/>
               </a:spcAft>
-              <a:defRPr sz="1700">
+              <a:defRPr sz="1900">
                 <a:solidFill>
                   <a:srgbClr val="333A4D"/>
                 </a:solidFill>
@@ -4740,7 +4740,7 @@
               <a:spcAft>
                 <a:spcPts val="1200"/>
               </a:spcAft>
-              <a:defRPr sz="1700">
+              <a:defRPr sz="1900">
                 <a:solidFill>
                   <a:srgbClr val="333A4D"/>
                 </a:solidFill>
@@ -4755,7 +4755,7 @@
               <a:spcAft>
                 <a:spcPts val="1200"/>
               </a:spcAft>
-              <a:defRPr sz="1700">
+              <a:defRPr sz="1900">
                 <a:solidFill>
                   <a:srgbClr val="333A4D"/>
                 </a:solidFill>
@@ -4770,7 +4770,7 @@
               <a:spcAft>
                 <a:spcPts val="1200"/>
               </a:spcAft>
-              <a:defRPr sz="1700">
+              <a:defRPr sz="1900">
                 <a:solidFill>
                   <a:srgbClr val="333A4D"/>
                 </a:solidFill>
@@ -4848,7 +4848,7 @@
           <a:lstStyle/>
           <a:p>
             <a:r>
-              <a:rPr sz="1100" b="1">
+              <a:rPr sz="1200" b="1">
                 <a:solidFill>
                   <a:srgbClr val="4F8CFF"/>
                 </a:solidFill>
@@ -4856,7 +4856,7 @@
               <a:t>용어 설명   </a:t>
             </a:r>
             <a:r>
-              <a:rPr sz="1100">
+              <a:rPr sz="1200">
                 <a:solidFill>
                   <a:srgbClr val="333A4D"/>
                 </a:solidFill>
@@ -4864,7 +4864,7 @@
               <a:t/>
             </a:r>
             <a:r>
-              <a:rPr sz="1100" b="1">
+              <a:rPr sz="1200" b="1">
                 <a:solidFill>
                   <a:srgbClr val="111C3B"/>
                 </a:solidFill>
@@ -4872,7 +4872,7 @@
               <a:t>IDE </a:t>
             </a:r>
             <a:r>
-              <a:rPr sz="1100">
+              <a:rPr sz="1200">
                 <a:solidFill>
                   <a:srgbClr val="333A4D"/>
                 </a:solidFill>
@@ -4880,7 +4880,7 @@
               <a:t>코드 작성, 실행, 오류 수정까지 한 프로그램 안에서 해결할 수 있게 해주는 통합 개발 도구</a:t>
             </a:r>
             <a:r>
-              <a:rPr sz="1100">
+              <a:rPr sz="1200">
                 <a:solidFill>
                   <a:srgbClr val="333A4D"/>
                 </a:solidFill>
@@ -4888,7 +4888,7 @@
               <a:t>     ·     </a:t>
             </a:r>
             <a:r>
-              <a:rPr sz="1100" b="1">
+              <a:rPr sz="1200" b="1">
                 <a:solidFill>
                   <a:srgbClr val="111C3B"/>
                 </a:solidFill>
@@ -4896,7 +4896,7 @@
               <a:t>Community 버전 </a:t>
             </a:r>
             <a:r>
-              <a:rPr sz="1100">
+              <a:rPr sz="1200">
                 <a:solidFill>
                   <a:srgbClr val="333A4D"/>
                 </a:solidFill>
@@ -5033,7 +5033,7 @@
           <a:lstStyle/>
           <a:p>
             <a:pPr>
-              <a:defRPr sz="3000" b="1">
+              <a:defRPr sz="3200" b="1">
                 <a:solidFill>
                   <a:srgbClr val="111C3B"/>
                 </a:solidFill>
@@ -5063,7 +5063,7 @@
         </p:spPr>
         <p:txBody>
           <a:bodyPr wrap="square">
-            <a:spAutoFit/>
+            <a:normAutofit/>
           </a:bodyPr>
           <a:lstStyle/>
           <a:p>
@@ -5071,7 +5071,7 @@
               <a:spcAft>
                 <a:spcPts val="1200"/>
               </a:spcAft>
-              <a:defRPr sz="1700">
+              <a:defRPr sz="1900">
                 <a:solidFill>
                   <a:srgbClr val="333A4D"/>
                 </a:solidFill>
@@ -5086,7 +5086,7 @@
               <a:spcAft>
                 <a:spcPts val="1200"/>
               </a:spcAft>
-              <a:defRPr sz="1700">
+              <a:defRPr sz="1900">
                 <a:solidFill>
                   <a:srgbClr val="333A4D"/>
                 </a:solidFill>
@@ -5101,7 +5101,7 @@
               <a:spcAft>
                 <a:spcPts val="1200"/>
               </a:spcAft>
-              <a:defRPr sz="1700">
+              <a:defRPr sz="1900">
                 <a:solidFill>
                   <a:srgbClr val="333A4D"/>
                 </a:solidFill>
@@ -5116,7 +5116,7 @@
               <a:spcAft>
                 <a:spcPts val="1200"/>
               </a:spcAft>
-              <a:defRPr sz="1700">
+              <a:defRPr sz="1900">
                 <a:solidFill>
                   <a:srgbClr val="333A4D"/>
                 </a:solidFill>
@@ -5131,7 +5131,7 @@
               <a:spcAft>
                 <a:spcPts val="1200"/>
               </a:spcAft>
-              <a:defRPr sz="1700">
+              <a:defRPr sz="1900">
                 <a:solidFill>
                   <a:srgbClr val="333A4D"/>
                 </a:solidFill>
@@ -5146,7 +5146,7 @@
               <a:spcAft>
                 <a:spcPts val="1200"/>
               </a:spcAft>
-              <a:defRPr sz="1700">
+              <a:defRPr sz="1900">
                 <a:solidFill>
                   <a:srgbClr val="333A4D"/>
                 </a:solidFill>
@@ -5224,7 +5224,7 @@
           <a:lstStyle/>
           <a:p>
             <a:r>
-              <a:rPr sz="1100" b="1">
+              <a:rPr sz="1200" b="1">
                 <a:solidFill>
                   <a:srgbClr val="4F8CFF"/>
                 </a:solidFill>
@@ -5232,7 +5232,7 @@
               <a:t>용어 설명   </a:t>
             </a:r>
             <a:r>
-              <a:rPr sz="1100">
+              <a:rPr sz="1200">
                 <a:solidFill>
                   <a:srgbClr val="333A4D"/>
                 </a:solidFill>
@@ -5240,7 +5240,7 @@
               <a:t/>
             </a:r>
             <a:r>
-              <a:rPr sz="1100" b="1">
+              <a:rPr sz="1200" b="1">
                 <a:solidFill>
                   <a:srgbClr val="111C3B"/>
                 </a:solidFill>
@@ -5248,7 +5248,7 @@
               <a:t>CLI </a:t>
             </a:r>
             <a:r>
-              <a:rPr sz="1100">
+              <a:rPr sz="1200">
                 <a:solidFill>
                   <a:srgbClr val="333A4D"/>
                 </a:solidFill>
@@ -5256,7 +5256,7 @@
               <a:t>화면의 버튼 대신 글자로 된 명령어로 컴퓨터에게 일을 시키는 방식</a:t>
             </a:r>
             <a:r>
-              <a:rPr sz="1100">
+              <a:rPr sz="1200">
                 <a:solidFill>
                   <a:srgbClr val="333A4D"/>
                 </a:solidFill>
@@ -5264,7 +5264,7 @@
               <a:t>     ·     </a:t>
             </a:r>
             <a:r>
-              <a:rPr sz="1100" b="1">
+              <a:rPr sz="1200" b="1">
                 <a:solidFill>
                   <a:srgbClr val="111C3B"/>
                 </a:solidFill>
@@ -5272,7 +5272,7 @@
               <a:t>Plan Mode </a:t>
             </a:r>
             <a:r>
-              <a:rPr sz="1100">
+              <a:rPr sz="1200">
                 <a:solidFill>
                   <a:srgbClr val="333A4D"/>
                 </a:solidFill>
@@ -5409,7 +5409,7 @@
           <a:lstStyle/>
           <a:p>
             <a:pPr>
-              <a:defRPr sz="3000" b="1">
+              <a:defRPr sz="3200" b="1">
                 <a:solidFill>
                   <a:srgbClr val="111C3B"/>
                 </a:solidFill>
@@ -5439,7 +5439,7 @@
         </p:spPr>
         <p:txBody>
           <a:bodyPr wrap="square">
-            <a:spAutoFit/>
+            <a:normAutofit/>
           </a:bodyPr>
           <a:lstStyle/>
           <a:p>
@@ -5447,7 +5447,7 @@
               <a:spcAft>
                 <a:spcPts val="1200"/>
               </a:spcAft>
-              <a:defRPr sz="1700">
+              <a:defRPr sz="1900">
                 <a:solidFill>
                   <a:srgbClr val="333A4D"/>
                 </a:solidFill>
@@ -5462,7 +5462,7 @@
               <a:spcAft>
                 <a:spcPts val="1200"/>
               </a:spcAft>
-              <a:defRPr sz="1700">
+              <a:defRPr sz="1900">
                 <a:solidFill>
                   <a:srgbClr val="333A4D"/>
                 </a:solidFill>
@@ -5477,7 +5477,7 @@
               <a:spcAft>
                 <a:spcPts val="1200"/>
               </a:spcAft>
-              <a:defRPr sz="1700">
+              <a:defRPr sz="1900">
                 <a:solidFill>
                   <a:srgbClr val="333A4D"/>
                 </a:solidFill>
@@ -5492,7 +5492,7 @@
               <a:spcAft>
                 <a:spcPts val="1200"/>
               </a:spcAft>
-              <a:defRPr sz="1700">
+              <a:defRPr sz="1900">
                 <a:solidFill>
                   <a:srgbClr val="333A4D"/>
                 </a:solidFill>
@@ -5507,7 +5507,7 @@
               <a:spcAft>
                 <a:spcPts val="1200"/>
               </a:spcAft>
-              <a:defRPr sz="1700">
+              <a:defRPr sz="1900">
                 <a:solidFill>
                   <a:srgbClr val="333A4D"/>
                 </a:solidFill>
@@ -5522,7 +5522,7 @@
               <a:spcAft>
                 <a:spcPts val="1200"/>
               </a:spcAft>
-              <a:defRPr sz="1700">
+              <a:defRPr sz="1900">
                 <a:solidFill>
                   <a:srgbClr val="333A4D"/>
                 </a:solidFill>
@@ -5600,7 +5600,7 @@
           <a:lstStyle/>
           <a:p>
             <a:r>
-              <a:rPr sz="1100" b="1">
+              <a:rPr sz="1200" b="1">
                 <a:solidFill>
                   <a:srgbClr val="4F8CFF"/>
                 </a:solidFill>
@@ -5608,7 +5608,7 @@
               <a:t>용어 설명   </a:t>
             </a:r>
             <a:r>
-              <a:rPr sz="1100">
+              <a:rPr sz="1200">
                 <a:solidFill>
                   <a:srgbClr val="333A4D"/>
                 </a:solidFill>
@@ -5616,7 +5616,7 @@
               <a:t/>
             </a:r>
             <a:r>
-              <a:rPr sz="1100" b="1">
+              <a:rPr sz="1200" b="1">
                 <a:solidFill>
                   <a:srgbClr val="111C3B"/>
                 </a:solidFill>
@@ -5624,7 +5624,7 @@
               <a:t>확장 프로그램 </a:t>
             </a:r>
             <a:r>
-              <a:rPr sz="1100">
+              <a:rPr sz="1200">
                 <a:solidFill>
                   <a:srgbClr val="333A4D"/>
                 </a:solidFill>
@@ -5632,7 +5632,7 @@
               <a:t>원래 프로그램에 새 기능을 더해주는 부가 프로그램</a:t>
             </a:r>
             <a:r>
-              <a:rPr sz="1100">
+              <a:rPr sz="1200">
                 <a:solidFill>
                   <a:srgbClr val="333A4D"/>
                 </a:solidFill>
@@ -5640,7 +5640,7 @@
               <a:t>     ·     </a:t>
             </a:r>
             <a:r>
-              <a:rPr sz="1100" b="1">
+              <a:rPr sz="1200" b="1">
                 <a:solidFill>
                   <a:srgbClr val="111C3B"/>
                 </a:solidFill>
@@ -5648,7 +5648,7 @@
               <a:t>API 키 </a:t>
             </a:r>
             <a:r>
-              <a:rPr sz="1100">
+              <a:rPr sz="1200">
                 <a:solidFill>
                   <a:srgbClr val="333A4D"/>
                 </a:solidFill>
@@ -5785,7 +5785,7 @@
           <a:lstStyle/>
           <a:p>
             <a:pPr>
-              <a:defRPr sz="3000" b="1">
+              <a:defRPr sz="3200" b="1">
                 <a:solidFill>
                   <a:srgbClr val="111C3B"/>
                 </a:solidFill>
@@ -5815,7 +5815,7 @@
         </p:spPr>
         <p:txBody>
           <a:bodyPr wrap="square">
-            <a:spAutoFit/>
+            <a:normAutofit/>
           </a:bodyPr>
           <a:lstStyle/>
           <a:p>
@@ -5823,7 +5823,7 @@
               <a:spcAft>
                 <a:spcPts val="1200"/>
               </a:spcAft>
-              <a:defRPr sz="1700">
+              <a:defRPr sz="1900">
                 <a:solidFill>
                   <a:srgbClr val="333A4D"/>
                 </a:solidFill>
@@ -5838,7 +5838,7 @@
               <a:spcAft>
                 <a:spcPts val="1200"/>
               </a:spcAft>
-              <a:defRPr sz="1700">
+              <a:defRPr sz="1900">
                 <a:solidFill>
                   <a:srgbClr val="333A4D"/>
                 </a:solidFill>
@@ -5853,7 +5853,7 @@
               <a:spcAft>
                 <a:spcPts val="1200"/>
               </a:spcAft>
-              <a:defRPr sz="1700">
+              <a:defRPr sz="1900">
                 <a:solidFill>
                   <a:srgbClr val="333A4D"/>
                 </a:solidFill>
@@ -5868,7 +5868,7 @@
               <a:spcAft>
                 <a:spcPts val="1200"/>
               </a:spcAft>
-              <a:defRPr sz="1700">
+              <a:defRPr sz="1900">
                 <a:solidFill>
                   <a:srgbClr val="333A4D"/>
                 </a:solidFill>
@@ -5883,7 +5883,7 @@
               <a:spcAft>
                 <a:spcPts val="1200"/>
               </a:spcAft>
-              <a:defRPr sz="1700">
+              <a:defRPr sz="1900">
                 <a:solidFill>
                   <a:srgbClr val="333A4D"/>
                 </a:solidFill>
@@ -5898,7 +5898,7 @@
               <a:spcAft>
                 <a:spcPts val="1200"/>
               </a:spcAft>
-              <a:defRPr sz="1700">
+              <a:defRPr sz="1900">
                 <a:solidFill>
                   <a:srgbClr val="333A4D"/>
                 </a:solidFill>
@@ -6037,7 +6037,7 @@
           <a:lstStyle/>
           <a:p>
             <a:pPr>
-              <a:defRPr sz="3000" b="1">
+              <a:defRPr sz="3200" b="1">
                 <a:solidFill>
                   <a:srgbClr val="111C3B"/>
                 </a:solidFill>
@@ -6067,7 +6067,7 @@
         </p:spPr>
         <p:txBody>
           <a:bodyPr wrap="square">
-            <a:spAutoFit/>
+            <a:normAutofit/>
           </a:bodyPr>
           <a:lstStyle/>
           <a:p>
@@ -6075,7 +6075,7 @@
               <a:spcAft>
                 <a:spcPts val="1200"/>
               </a:spcAft>
-              <a:defRPr sz="1700">
+              <a:defRPr sz="1900">
                 <a:solidFill>
                   <a:srgbClr val="333A4D"/>
                 </a:solidFill>
@@ -6090,7 +6090,7 @@
               <a:spcAft>
                 <a:spcPts val="1200"/>
               </a:spcAft>
-              <a:defRPr sz="1700">
+              <a:defRPr sz="1900">
                 <a:solidFill>
                   <a:srgbClr val="333A4D"/>
                 </a:solidFill>
@@ -6105,7 +6105,7 @@
               <a:spcAft>
                 <a:spcPts val="1200"/>
               </a:spcAft>
-              <a:defRPr sz="1700">
+              <a:defRPr sz="1900">
                 <a:solidFill>
                   <a:srgbClr val="333A4D"/>
                 </a:solidFill>
@@ -6120,7 +6120,7 @@
               <a:spcAft>
                 <a:spcPts val="1200"/>
               </a:spcAft>
-              <a:defRPr sz="1700">
+              <a:defRPr sz="1900">
                 <a:solidFill>
                   <a:srgbClr val="333A4D"/>
                 </a:solidFill>
@@ -6135,7 +6135,7 @@
               <a:spcAft>
                 <a:spcPts val="1200"/>
               </a:spcAft>
-              <a:defRPr sz="1700">
+              <a:defRPr sz="1900">
                 <a:solidFill>
                   <a:srgbClr val="333A4D"/>
                 </a:solidFill>
@@ -6150,7 +6150,7 @@
               <a:spcAft>
                 <a:spcPts val="1200"/>
               </a:spcAft>
-              <a:defRPr sz="1700">
+              <a:defRPr sz="1900">
                 <a:solidFill>
                   <a:srgbClr val="333A4D"/>
                 </a:solidFill>
@@ -6187,7 +6187,7 @@
           <a:lstStyle/>
           <a:p>
             <a:pPr>
-              <a:defRPr sz="1300">
+              <a:defRPr sz="1400">
                 <a:solidFill>
                   <a:srgbClr val="9CD8FF"/>
                 </a:solidFill>
@@ -6200,7 +6200,7 @@
           </a:p>
           <a:p>
             <a:pPr>
-              <a:defRPr sz="1300">
+              <a:defRPr sz="1400">
                 <a:solidFill>
                   <a:srgbClr val="9CD8FF"/>
                 </a:solidFill>
@@ -6213,7 +6213,7 @@
           </a:p>
           <a:p>
             <a:pPr>
-              <a:defRPr sz="1300">
+              <a:defRPr sz="1400">
                 <a:solidFill>
                   <a:srgbClr val="9CD8FF"/>
                 </a:solidFill>
@@ -6223,7 +6223,7 @@
           </a:p>
           <a:p>
             <a:pPr>
-              <a:defRPr sz="1300">
+              <a:defRPr sz="1400">
                 <a:solidFill>
                   <a:srgbClr val="9CD8FF"/>
                 </a:solidFill>
@@ -6236,7 +6236,7 @@
           </a:p>
           <a:p>
             <a:pPr>
-              <a:defRPr sz="1300">
+              <a:defRPr sz="1400">
                 <a:solidFill>
                   <a:srgbClr val="9CD8FF"/>
                 </a:solidFill>
@@ -6249,7 +6249,7 @@
           </a:p>
           <a:p>
             <a:pPr>
-              <a:defRPr sz="1300">
+              <a:defRPr sz="1400">
                 <a:solidFill>
                   <a:srgbClr val="9CD8FF"/>
                 </a:solidFill>
@@ -6262,7 +6262,7 @@
           </a:p>
           <a:p>
             <a:pPr>
-              <a:defRPr sz="1300">
+              <a:defRPr sz="1400">
                 <a:solidFill>
                   <a:srgbClr val="9CD8FF"/>
                 </a:solidFill>
@@ -6341,7 +6341,7 @@
           <a:lstStyle/>
           <a:p>
             <a:r>
-              <a:rPr sz="1100" b="1">
+              <a:rPr sz="1200" b="1">
                 <a:solidFill>
                   <a:srgbClr val="4F8CFF"/>
                 </a:solidFill>
@@ -6349,7 +6349,7 @@
               <a:t>용어 설명   </a:t>
             </a:r>
             <a:r>
-              <a:rPr sz="1100">
+              <a:rPr sz="1200">
                 <a:solidFill>
                   <a:srgbClr val="333A4D"/>
                 </a:solidFill>
@@ -6357,7 +6357,7 @@
               <a:t/>
             </a:r>
             <a:r>
-              <a:rPr sz="1100" b="1">
+              <a:rPr sz="1200" b="1">
                 <a:solidFill>
                   <a:srgbClr val="111C3B"/>
                 </a:solidFill>
@@ -6365,7 +6365,7 @@
               <a:t>pandas </a:t>
             </a:r>
             <a:r>
-              <a:rPr sz="1100">
+              <a:rPr sz="1200">
                 <a:solidFill>
                   <a:srgbClr val="333A4D"/>
                 </a:solidFill>
@@ -6373,7 +6373,7 @@
               <a:t>엑셀 같은 표 형태 데이터를 파이썬에서 쉽게 다룰 수 있게 해주는 도구 모음</a:t>
             </a:r>
             <a:r>
-              <a:rPr sz="1100">
+              <a:rPr sz="1200">
                 <a:solidFill>
                   <a:srgbClr val="333A4D"/>
                 </a:solidFill>
@@ -6381,7 +6381,7 @@
               <a:t>     ·     </a:t>
             </a:r>
             <a:r>
-              <a:rPr sz="1100" b="1">
+              <a:rPr sz="1200" b="1">
                 <a:solidFill>
                   <a:srgbClr val="111C3B"/>
                 </a:solidFill>
@@ -6389,7 +6389,7 @@
               <a:t>파이썬(Python) </a:t>
             </a:r>
             <a:r>
-              <a:rPr sz="1100">
+              <a:rPr sz="1200">
                 <a:solidFill>
                   <a:srgbClr val="333A4D"/>
                 </a:solidFill>
@@ -6526,7 +6526,7 @@
           <a:lstStyle/>
           <a:p>
             <a:pPr>
-              <a:defRPr sz="3000" b="1">
+              <a:defRPr sz="3200" b="1">
                 <a:solidFill>
                   <a:srgbClr val="111C3B"/>
                 </a:solidFill>
@@ -6556,7 +6556,7 @@
         </p:spPr>
         <p:txBody>
           <a:bodyPr wrap="square">
-            <a:spAutoFit/>
+            <a:normAutofit/>
           </a:bodyPr>
           <a:lstStyle/>
           <a:p>
@@ -6564,7 +6564,7 @@
               <a:spcAft>
                 <a:spcPts val="1200"/>
               </a:spcAft>
-              <a:defRPr sz="1700">
+              <a:defRPr sz="1900">
                 <a:solidFill>
                   <a:srgbClr val="333A4D"/>
                 </a:solidFill>
@@ -6579,7 +6579,7 @@
               <a:spcAft>
                 <a:spcPts val="1200"/>
               </a:spcAft>
-              <a:defRPr sz="1700">
+              <a:defRPr sz="1900">
                 <a:solidFill>
                   <a:srgbClr val="333A4D"/>
                 </a:solidFill>
@@ -6594,7 +6594,7 @@
               <a:spcAft>
                 <a:spcPts val="1200"/>
               </a:spcAft>
-              <a:defRPr sz="1700">
+              <a:defRPr sz="1900">
                 <a:solidFill>
                   <a:srgbClr val="333A4D"/>
                 </a:solidFill>
@@ -6609,7 +6609,7 @@
               <a:spcAft>
                 <a:spcPts val="1200"/>
               </a:spcAft>
-              <a:defRPr sz="1700">
+              <a:defRPr sz="1900">
                 <a:solidFill>
                   <a:srgbClr val="333A4D"/>
                 </a:solidFill>
@@ -6624,7 +6624,7 @@
               <a:spcAft>
                 <a:spcPts val="1200"/>
               </a:spcAft>
-              <a:defRPr sz="1700">
+              <a:defRPr sz="1900">
                 <a:solidFill>
                   <a:srgbClr val="333A4D"/>
                 </a:solidFill>
@@ -6639,7 +6639,7 @@
               <a:spcAft>
                 <a:spcPts val="1200"/>
               </a:spcAft>
-              <a:defRPr sz="1700">
+              <a:defRPr sz="1900">
                 <a:solidFill>
                   <a:srgbClr val="333A4D"/>
                 </a:solidFill>
@@ -6717,7 +6717,7 @@
           <a:lstStyle/>
           <a:p>
             <a:r>
-              <a:rPr sz="1100" b="1">
+              <a:rPr sz="1200" b="1">
                 <a:solidFill>
                   <a:srgbClr val="4F8CFF"/>
                 </a:solidFill>
@@ -6725,7 +6725,7 @@
               <a:t>용어 설명   </a:t>
             </a:r>
             <a:r>
-              <a:rPr sz="1100">
+              <a:rPr sz="1200">
                 <a:solidFill>
                   <a:srgbClr val="333A4D"/>
                 </a:solidFill>
@@ -6733,7 +6733,7 @@
               <a:t/>
             </a:r>
             <a:r>
-              <a:rPr sz="1100" b="1">
+              <a:rPr sz="1200" b="1">
                 <a:solidFill>
                   <a:srgbClr val="111C3B"/>
                 </a:solidFill>
@@ -6741,7 +6741,7 @@
               <a:t>배치 파일(.bat) </a:t>
             </a:r>
             <a:r>
-              <a:rPr sz="1100">
+              <a:rPr sz="1200">
                 <a:solidFill>
                   <a:srgbClr val="333A4D"/>
                 </a:solidFill>
@@ -6749,7 +6749,7 @@
               <a:t>여러 명령어를 순서대로 실행하도록 적어둔 파일. 더블클릭하면 바로 실행돼요</a:t>
             </a:r>
             <a:r>
-              <a:rPr sz="1100">
+              <a:rPr sz="1200">
                 <a:solidFill>
                   <a:srgbClr val="333A4D"/>
                 </a:solidFill>
@@ -6757,7 +6757,7 @@
               <a:t>     ·     </a:t>
             </a:r>
             <a:r>
-              <a:rPr sz="1100" b="1">
+              <a:rPr sz="1200" b="1">
                 <a:solidFill>
                   <a:srgbClr val="111C3B"/>
                 </a:solidFill>
@@ -6765,7 +6765,7 @@
               <a:t>실행 파일(.exe) </a:t>
             </a:r>
             <a:r>
-              <a:rPr sz="1100">
+              <a:rPr sz="1200">
                 <a:solidFill>
                   <a:srgbClr val="333A4D"/>
                 </a:solidFill>
